--- a/Unidad 4/4.3 Ejercicios_Cynthia Jasmine Morales Torres.pptx
+++ b/Unidad 4/4.3 Ejercicios_Cynthia Jasmine Morales Torres.pptx
@@ -11,6 +11,7 @@
     <p:sldId id="259" r:id="rId5"/>
     <p:sldId id="261" r:id="rId6"/>
     <p:sldId id="260" r:id="rId7"/>
+    <p:sldId id="262" r:id="rId8"/>
   </p:sldIdLst>
   <p:sldSz cx="12192000" cy="6858000"/>
   <p:notesSz cx="6858000" cy="9144000"/>
@@ -266,7 +267,7 @@
           <a:p>
             <a:fld id="{62FE627A-71E9-442C-AD02-2535AF25F1F1}" type="datetimeFigureOut">
               <a:rPr lang="es-MX" smtClean="0"/>
-              <a:t>24/03/2026</a:t>
+              <a:t>26/03/2026</a:t>
             </a:fld>
             <a:endParaRPr lang="es-MX"/>
           </a:p>
@@ -466,7 +467,7 @@
           <a:p>
             <a:fld id="{62FE627A-71E9-442C-AD02-2535AF25F1F1}" type="datetimeFigureOut">
               <a:rPr lang="es-MX" smtClean="0"/>
-              <a:t>24/03/2026</a:t>
+              <a:t>26/03/2026</a:t>
             </a:fld>
             <a:endParaRPr lang="es-MX"/>
           </a:p>
@@ -676,7 +677,7 @@
           <a:p>
             <a:fld id="{62FE627A-71E9-442C-AD02-2535AF25F1F1}" type="datetimeFigureOut">
               <a:rPr lang="es-MX" smtClean="0"/>
-              <a:t>24/03/2026</a:t>
+              <a:t>26/03/2026</a:t>
             </a:fld>
             <a:endParaRPr lang="es-MX"/>
           </a:p>
@@ -876,7 +877,7 @@
           <a:p>
             <a:fld id="{62FE627A-71E9-442C-AD02-2535AF25F1F1}" type="datetimeFigureOut">
               <a:rPr lang="es-MX" smtClean="0"/>
-              <a:t>24/03/2026</a:t>
+              <a:t>26/03/2026</a:t>
             </a:fld>
             <a:endParaRPr lang="es-MX"/>
           </a:p>
@@ -1152,7 +1153,7 @@
           <a:p>
             <a:fld id="{62FE627A-71E9-442C-AD02-2535AF25F1F1}" type="datetimeFigureOut">
               <a:rPr lang="es-MX" smtClean="0"/>
-              <a:t>24/03/2026</a:t>
+              <a:t>26/03/2026</a:t>
             </a:fld>
             <a:endParaRPr lang="es-MX"/>
           </a:p>
@@ -1420,7 +1421,7 @@
           <a:p>
             <a:fld id="{62FE627A-71E9-442C-AD02-2535AF25F1F1}" type="datetimeFigureOut">
               <a:rPr lang="es-MX" smtClean="0"/>
-              <a:t>24/03/2026</a:t>
+              <a:t>26/03/2026</a:t>
             </a:fld>
             <a:endParaRPr lang="es-MX"/>
           </a:p>
@@ -1835,7 +1836,7 @@
           <a:p>
             <a:fld id="{62FE627A-71E9-442C-AD02-2535AF25F1F1}" type="datetimeFigureOut">
               <a:rPr lang="es-MX" smtClean="0"/>
-              <a:t>24/03/2026</a:t>
+              <a:t>26/03/2026</a:t>
             </a:fld>
             <a:endParaRPr lang="es-MX"/>
           </a:p>
@@ -1977,7 +1978,7 @@
           <a:p>
             <a:fld id="{62FE627A-71E9-442C-AD02-2535AF25F1F1}" type="datetimeFigureOut">
               <a:rPr lang="es-MX" smtClean="0"/>
-              <a:t>24/03/2026</a:t>
+              <a:t>26/03/2026</a:t>
             </a:fld>
             <a:endParaRPr lang="es-MX"/>
           </a:p>
@@ -2090,7 +2091,7 @@
           <a:p>
             <a:fld id="{62FE627A-71E9-442C-AD02-2535AF25F1F1}" type="datetimeFigureOut">
               <a:rPr lang="es-MX" smtClean="0"/>
-              <a:t>24/03/2026</a:t>
+              <a:t>26/03/2026</a:t>
             </a:fld>
             <a:endParaRPr lang="es-MX"/>
           </a:p>
@@ -2403,7 +2404,7 @@
           <a:p>
             <a:fld id="{62FE627A-71E9-442C-AD02-2535AF25F1F1}" type="datetimeFigureOut">
               <a:rPr lang="es-MX" smtClean="0"/>
-              <a:t>24/03/2026</a:t>
+              <a:t>26/03/2026</a:t>
             </a:fld>
             <a:endParaRPr lang="es-MX"/>
           </a:p>
@@ -2692,7 +2693,7 @@
           <a:p>
             <a:fld id="{62FE627A-71E9-442C-AD02-2535AF25F1F1}" type="datetimeFigureOut">
               <a:rPr lang="es-MX" smtClean="0"/>
-              <a:t>24/03/2026</a:t>
+              <a:t>26/03/2026</a:t>
             </a:fld>
             <a:endParaRPr lang="es-MX"/>
           </a:p>
@@ -2935,7 +2936,7 @@
           <a:p>
             <a:fld id="{62FE627A-71E9-442C-AD02-2535AF25F1F1}" type="datetimeFigureOut">
               <a:rPr lang="es-MX" smtClean="0"/>
-              <a:t>24/03/2026</a:t>
+              <a:t>26/03/2026</a:t>
             </a:fld>
             <a:endParaRPr lang="es-MX"/>
           </a:p>
@@ -3743,7 +3744,7 @@
                 <a:ea typeface="Calibri" panose="020F0502020204030204" pitchFamily="34" charset="0"/>
                 <a:cs typeface="Arial" panose="020B0604020202020204" pitchFamily="34" charset="0"/>
               </a:rPr>
-              <a:t>4.2 Reporte de Practica</a:t>
+              <a:t>4.3 Ejercicio</a:t>
             </a:r>
             <a:endParaRPr lang="es-MX" sz="1600" dirty="0">
               <a:effectLst/>
@@ -3781,12 +3782,12 @@
               </a:spcAft>
             </a:pPr>
             <a:r>
-              <a:rPr lang="es-MX" b="1" dirty="0">
+              <a:rPr lang="es-MX" b="1">
                 <a:latin typeface="Arial" panose="020B0604020202020204" pitchFamily="34" charset="0"/>
                 <a:ea typeface="Calibri" panose="020F0502020204030204" pitchFamily="34" charset="0"/>
                 <a:cs typeface="Arial" panose="020B0604020202020204" pitchFamily="34" charset="0"/>
               </a:rPr>
-              <a:t>09/03/2026</a:t>
+              <a:t>13/03/2026</a:t>
             </a:r>
             <a:endParaRPr lang="es-MX" sz="1600" dirty="0">
               <a:effectLst/>
@@ -4864,6 +4865,105 @@
     <p:extLst>
       <p:ext uri="{BB962C8B-B14F-4D97-AF65-F5344CB8AC3E}">
         <p14:creationId xmlns:p14="http://schemas.microsoft.com/office/powerpoint/2010/main" val="755245462"/>
+      </p:ext>
+    </p:extLst>
+  </p:cSld>
+  <p:clrMapOvr>
+    <a:masterClrMapping/>
+  </p:clrMapOvr>
+</p:sld>
+</file>
+
+<file path=ppt/slides/slide7.xml><?xml version="1.0" encoding="utf-8"?>
+<p:sld xmlns:a="http://schemas.openxmlformats.org/drawingml/2006/main" xmlns:r="http://schemas.openxmlformats.org/officeDocument/2006/relationships" xmlns:p="http://schemas.openxmlformats.org/presentationml/2006/main">
+  <p:cSld>
+    <p:spTree>
+      <p:nvGrpSpPr>
+        <p:cNvPr id="1" name=""/>
+        <p:cNvGrpSpPr/>
+        <p:nvPr/>
+      </p:nvGrpSpPr>
+      <p:grpSpPr>
+        <a:xfrm>
+          <a:off x="0" y="0"/>
+          <a:ext cx="0" cy="0"/>
+          <a:chOff x="0" y="0"/>
+          <a:chExt cx="0" cy="0"/>
+        </a:xfrm>
+      </p:grpSpPr>
+      <p:sp>
+        <p:nvSpPr>
+          <p:cNvPr id="2" name="Título 1">
+            <a:extLst>
+              <a:ext uri="{FF2B5EF4-FFF2-40B4-BE49-F238E27FC236}">
+                <a16:creationId xmlns:a16="http://schemas.microsoft.com/office/drawing/2014/main" id="{6D32CB45-9C4E-69A2-CFEA-02C1C7ECBF27}"/>
+              </a:ext>
+            </a:extLst>
+          </p:cNvPr>
+          <p:cNvSpPr>
+            <a:spLocks noGrp="1"/>
+          </p:cNvSpPr>
+          <p:nvPr>
+            <p:ph type="title"/>
+          </p:nvPr>
+        </p:nvSpPr>
+        <p:spPr/>
+        <p:txBody>
+          <a:bodyPr/>
+          <a:lstStyle/>
+          <a:p>
+            <a:r>
+              <a:rPr lang="es-MX" dirty="0"/>
+              <a:t>Anexo link de la actividad solicitada y enviada a </a:t>
+            </a:r>
+            <a:r>
+              <a:rPr lang="es-MX" dirty="0" err="1"/>
+              <a:t>github</a:t>
+            </a:r>
+            <a:r>
+              <a:rPr lang="es-MX" dirty="0"/>
+              <a:t>:</a:t>
+            </a:r>
+          </a:p>
+        </p:txBody>
+      </p:sp>
+      <p:sp>
+        <p:nvSpPr>
+          <p:cNvPr id="3" name="Marcador de contenido 2">
+            <a:extLst>
+              <a:ext uri="{FF2B5EF4-FFF2-40B4-BE49-F238E27FC236}">
+                <a16:creationId xmlns:a16="http://schemas.microsoft.com/office/drawing/2014/main" id="{DB04BD36-5738-B8C3-1E9C-5BBEF7E87FFD}"/>
+              </a:ext>
+            </a:extLst>
+          </p:cNvPr>
+          <p:cNvSpPr>
+            <a:spLocks noGrp="1"/>
+          </p:cNvSpPr>
+          <p:nvPr>
+            <p:ph idx="1"/>
+          </p:nvPr>
+        </p:nvSpPr>
+        <p:spPr/>
+        <p:txBody>
+          <a:bodyPr/>
+          <a:lstStyle/>
+          <a:p>
+            <a:pPr marL="0" indent="0">
+              <a:buNone/>
+            </a:pPr>
+            <a:r>
+              <a:rPr lang="es-MX" dirty="0">
+                <a:hlinkClick r:id="rId2"/>
+              </a:rPr>
+              <a:t>https://github.com/Cynthia21Morales/Lenguajes_Y_Autonomas1_CynthiaJasmineMT/blob/main/Unidad%204/4.3%20Ejercicios_Cynthia%20Jasmine%20Morales%20Torres.pptx</a:t>
+            </a:r>
+          </a:p>
+        </p:txBody>
+      </p:sp>
+    </p:spTree>
+    <p:extLst>
+      <p:ext uri="{BB962C8B-B14F-4D97-AF65-F5344CB8AC3E}">
+        <p14:creationId xmlns:p14="http://schemas.microsoft.com/office/powerpoint/2010/main" val="3016226656"/>
       </p:ext>
     </p:extLst>
   </p:cSld>
